--- a/docs/육안분석 작업 스케쥴.pptx
+++ b/docs/육안분석 작업 스케쥴.pptx
@@ -107,6 +107,11 @@
       </a:defRPr>
     </a:lvl9pPr>
   </p:defaultTextStyle>
+  <p:extLst>
+    <p:ext uri="{EFAFB233-063F-42B5-8137-9DF3F51BA10A}">
+      <p15:sldGuideLst xmlns:p15="http://schemas.microsoft.com/office/powerpoint/2012/main"/>
+    </p:ext>
+  </p:extLst>
 </p:presentation>
 </file>
 
@@ -192,7 +197,7 @@
           <a:p>
             <a:fld id="{9749F956-9BE7-4F60-875A-212F27B38D0F}" type="datetimeFigureOut">
               <a:rPr lang="ko-KR" altLang="en-US" smtClean="0"/>
-              <a:t>2026-04-01</a:t>
+              <a:t>2026. 4. 14.</a:t>
             </a:fld>
             <a:endParaRPr lang="ko-KR" altLang="en-US"/>
           </a:p>
@@ -674,7 +679,7 @@
           <a:p>
             <a:fld id="{A8BD2C66-B413-46AF-AA54-D3B59D4E3C45}" type="datetimeFigureOut">
               <a:rPr lang="ko-KR" altLang="en-US" smtClean="0"/>
-              <a:t>2026-04-01</a:t>
+              <a:t>2026. 4. 14.</a:t>
             </a:fld>
             <a:endParaRPr lang="ko-KR" altLang="en-US"/>
           </a:p>
@@ -844,7 +849,7 @@
           <a:p>
             <a:fld id="{A8BD2C66-B413-46AF-AA54-D3B59D4E3C45}" type="datetimeFigureOut">
               <a:rPr lang="ko-KR" altLang="en-US" smtClean="0"/>
-              <a:t>2026-04-01</a:t>
+              <a:t>2026. 4. 14.</a:t>
             </a:fld>
             <a:endParaRPr lang="ko-KR" altLang="en-US"/>
           </a:p>
@@ -1024,7 +1029,7 @@
           <a:p>
             <a:fld id="{A8BD2C66-B413-46AF-AA54-D3B59D4E3C45}" type="datetimeFigureOut">
               <a:rPr lang="ko-KR" altLang="en-US" smtClean="0"/>
-              <a:t>2026-04-01</a:t>
+              <a:t>2026. 4. 14.</a:t>
             </a:fld>
             <a:endParaRPr lang="ko-KR" altLang="en-US"/>
           </a:p>
@@ -1194,7 +1199,7 @@
           <a:p>
             <a:fld id="{A8BD2C66-B413-46AF-AA54-D3B59D4E3C45}" type="datetimeFigureOut">
               <a:rPr lang="ko-KR" altLang="en-US" smtClean="0"/>
-              <a:t>2026-04-01</a:t>
+              <a:t>2026. 4. 14.</a:t>
             </a:fld>
             <a:endParaRPr lang="ko-KR" altLang="en-US"/>
           </a:p>
@@ -1440,7 +1445,7 @@
           <a:p>
             <a:fld id="{A8BD2C66-B413-46AF-AA54-D3B59D4E3C45}" type="datetimeFigureOut">
               <a:rPr lang="ko-KR" altLang="en-US" smtClean="0"/>
-              <a:t>2026-04-01</a:t>
+              <a:t>2026. 4. 14.</a:t>
             </a:fld>
             <a:endParaRPr lang="ko-KR" altLang="en-US"/>
           </a:p>
@@ -1672,7 +1677,7 @@
           <a:p>
             <a:fld id="{A8BD2C66-B413-46AF-AA54-D3B59D4E3C45}" type="datetimeFigureOut">
               <a:rPr lang="ko-KR" altLang="en-US" smtClean="0"/>
-              <a:t>2026-04-01</a:t>
+              <a:t>2026. 4. 14.</a:t>
             </a:fld>
             <a:endParaRPr lang="ko-KR" altLang="en-US"/>
           </a:p>
@@ -2039,7 +2044,7 @@
           <a:p>
             <a:fld id="{A8BD2C66-B413-46AF-AA54-D3B59D4E3C45}" type="datetimeFigureOut">
               <a:rPr lang="ko-KR" altLang="en-US" smtClean="0"/>
-              <a:t>2026-04-01</a:t>
+              <a:t>2026. 4. 14.</a:t>
             </a:fld>
             <a:endParaRPr lang="ko-KR" altLang="en-US"/>
           </a:p>
@@ -2157,7 +2162,7 @@
           <a:p>
             <a:fld id="{A8BD2C66-B413-46AF-AA54-D3B59D4E3C45}" type="datetimeFigureOut">
               <a:rPr lang="ko-KR" altLang="en-US" smtClean="0"/>
-              <a:t>2026-04-01</a:t>
+              <a:t>2026. 4. 14.</a:t>
             </a:fld>
             <a:endParaRPr lang="ko-KR" altLang="en-US"/>
           </a:p>
@@ -2252,7 +2257,7 @@
           <a:p>
             <a:fld id="{A8BD2C66-B413-46AF-AA54-D3B59D4E3C45}" type="datetimeFigureOut">
               <a:rPr lang="ko-KR" altLang="en-US" smtClean="0"/>
-              <a:t>2026-04-01</a:t>
+              <a:t>2026. 4. 14.</a:t>
             </a:fld>
             <a:endParaRPr lang="ko-KR" altLang="en-US"/>
           </a:p>
@@ -2529,7 +2534,7 @@
           <a:p>
             <a:fld id="{A8BD2C66-B413-46AF-AA54-D3B59D4E3C45}" type="datetimeFigureOut">
               <a:rPr lang="ko-KR" altLang="en-US" smtClean="0"/>
-              <a:t>2026-04-01</a:t>
+              <a:t>2026. 4. 14.</a:t>
             </a:fld>
             <a:endParaRPr lang="ko-KR" altLang="en-US"/>
           </a:p>
@@ -2786,7 +2791,7 @@
           <a:p>
             <a:fld id="{A8BD2C66-B413-46AF-AA54-D3B59D4E3C45}" type="datetimeFigureOut">
               <a:rPr lang="ko-KR" altLang="en-US" smtClean="0"/>
-              <a:t>2026-04-01</a:t>
+              <a:t>2026. 4. 14.</a:t>
             </a:fld>
             <a:endParaRPr lang="ko-KR" altLang="en-US"/>
           </a:p>
@@ -2999,7 +3004,7 @@
           <a:p>
             <a:fld id="{A8BD2C66-B413-46AF-AA54-D3B59D4E3C45}" type="datetimeFigureOut">
               <a:rPr lang="ko-KR" altLang="en-US" smtClean="0"/>
-              <a:t>2026-04-01</a:t>
+              <a:t>2026. 4. 14.</a:t>
             </a:fld>
             <a:endParaRPr lang="ko-KR" altLang="en-US"/>
           </a:p>
@@ -6819,10 +6824,10 @@
               <a:t>육안분석 작업 </a:t>
             </a:r>
             <a:r>
-              <a:rPr lang="en-US" altLang="ko-KR" sz="1400" b="1" dirty="0" err="1">
+              <a:rPr lang="en-US" altLang="ko-KR" sz="1400" b="1" dirty="0">
                 <a:latin typeface="+mn-ea"/>
               </a:rPr>
-              <a:t>Shcedule</a:t>
+              <a:t>Schedule</a:t>
             </a:r>
             <a:endParaRPr lang="ko-KR" altLang="en-US" sz="1400" b="1" dirty="0">
               <a:latin typeface="+mn-ea"/>
